--- a/Mango-M32F4/11.CAN/CAN.pptx
+++ b/Mango-M32F4/11.CAN/CAN.pptx
@@ -5,10 +5,10 @@
     <p:sldMasterId id="2147483649" r:id="rId1"/>
   </p:sldMasterIdLst>
   <p:notesMasterIdLst>
-    <p:notesMasterId r:id="rId38"/>
+    <p:notesMasterId r:id="rId39"/>
   </p:notesMasterIdLst>
   <p:handoutMasterIdLst>
-    <p:handoutMasterId r:id="rId39"/>
+    <p:handoutMasterId r:id="rId40"/>
   </p:handoutMasterIdLst>
   <p:sldIdLst>
     <p:sldId id="308" r:id="rId2"/>
@@ -45,8 +45,9 @@
     <p:sldId id="376" r:id="rId33"/>
     <p:sldId id="377" r:id="rId34"/>
     <p:sldId id="382" r:id="rId35"/>
-    <p:sldId id="383" r:id="rId36"/>
-    <p:sldId id="378" r:id="rId37"/>
+    <p:sldId id="388" r:id="rId36"/>
+    <p:sldId id="383" r:id="rId37"/>
+    <p:sldId id="378" r:id="rId38"/>
   </p:sldIdLst>
   <p:sldSz cx="9144000" cy="6858000" type="screen4x3"/>
   <p:notesSz cx="6799263" cy="9929813"/>
@@ -15548,6 +15549,325 @@
         <p:cNvPr id="1" name="">
           <a:extLst>
             <a:ext uri="{FF2B5EF4-FFF2-40B4-BE49-F238E27FC236}">
+              <a16:creationId xmlns:a16="http://schemas.microsoft.com/office/drawing/2014/main" id="{C0E56A9B-80A5-1915-0507-8A52E5C018B2}"/>
+            </a:ext>
+          </a:extLst>
+        </p:cNvPr>
+        <p:cNvGrpSpPr/>
+        <p:nvPr/>
+      </p:nvGrpSpPr>
+      <p:grpSpPr>
+        <a:xfrm>
+          <a:off x="0" y="0"/>
+          <a:ext cx="0" cy="0"/>
+          <a:chOff x="0" y="0"/>
+          <a:chExt cx="0" cy="0"/>
+        </a:xfrm>
+      </p:grpSpPr>
+      <p:sp>
+        <p:nvSpPr>
+          <p:cNvPr id="2" name="제목 1">
+            <a:extLst>
+              <a:ext uri="{FF2B5EF4-FFF2-40B4-BE49-F238E27FC236}">
+                <a16:creationId xmlns:a16="http://schemas.microsoft.com/office/drawing/2014/main" id="{E1A1ADBD-FACC-EFEC-89B7-9E9ABDBA786D}"/>
+              </a:ext>
+            </a:extLst>
+          </p:cNvPr>
+          <p:cNvSpPr>
+            <a:spLocks noGrp="1"/>
+          </p:cNvSpPr>
+          <p:nvPr>
+            <p:ph type="title"/>
+          </p:nvPr>
+        </p:nvSpPr>
+        <p:spPr/>
+        <p:txBody>
+          <a:bodyPr/>
+          <a:lstStyle/>
+          <a:p>
+            <a:r>
+              <a:rPr lang="ko-KR" altLang="en-US" dirty="0"/>
+              <a:t>테스트 환경</a:t>
+            </a:r>
+          </a:p>
+        </p:txBody>
+      </p:sp>
+      <p:sp>
+        <p:nvSpPr>
+          <p:cNvPr id="3" name="Content Placeholder 2">
+            <a:extLst>
+              <a:ext uri="{FF2B5EF4-FFF2-40B4-BE49-F238E27FC236}">
+                <a16:creationId xmlns:a16="http://schemas.microsoft.com/office/drawing/2014/main" id="{4E907BA5-97B1-DEC1-A71A-4D68FE2E183B}"/>
+              </a:ext>
+            </a:extLst>
+          </p:cNvPr>
+          <p:cNvSpPr txBox="1">
+            <a:spLocks/>
+          </p:cNvSpPr>
+          <p:nvPr/>
+        </p:nvSpPr>
+        <p:spPr bwMode="auto">
+          <a:xfrm>
+            <a:off x="628650" y="692696"/>
+            <a:ext cx="7886700" cy="5688632"/>
+          </a:xfrm>
+          <a:prstGeom prst="rect">
+            <a:avLst/>
+          </a:prstGeom>
+          <a:noFill/>
+          <a:ln w="9525">
+            <a:noFill/>
+            <a:miter lim="800000"/>
+            <a:headEnd/>
+            <a:tailEnd/>
+          </a:ln>
+          <a:effectLst/>
+        </p:spPr>
+        <p:txBody>
+          <a:bodyPr vert="horz" wrap="square" lIns="91440" tIns="45720" rIns="91440" bIns="45720" numCol="1" anchor="t" anchorCtr="0" compatLnSpc="1">
+            <a:prstTxWarp prst="textNoShape">
+              <a:avLst/>
+            </a:prstTxWarp>
+            <a:normAutofit/>
+          </a:bodyPr>
+          <a:lstStyle>
+            <a:lvl1pPr marL="342900" indent="-342900" algn="l" rtl="0" fontAlgn="base" latinLnBrk="1">
+              <a:spcBef>
+                <a:spcPct val="20000"/>
+              </a:spcBef>
+              <a:spcAft>
+                <a:spcPct val="0"/>
+              </a:spcAft>
+              <a:buClr>
+                <a:schemeClr val="tx1"/>
+              </a:buClr>
+              <a:buChar char="•"/>
+              <a:defRPr kumimoji="1" sz="2000">
+                <a:solidFill>
+                  <a:schemeClr val="tx1"/>
+                </a:solidFill>
+                <a:latin typeface="Verdana" pitchFamily="34" charset="0"/>
+                <a:ea typeface="+mn-ea"/>
+                <a:cs typeface="+mn-cs"/>
+              </a:defRPr>
+            </a:lvl1pPr>
+            <a:lvl2pPr marL="742950" indent="-285750" algn="l" rtl="0" fontAlgn="base" latinLnBrk="1">
+              <a:spcBef>
+                <a:spcPct val="20000"/>
+              </a:spcBef>
+              <a:spcAft>
+                <a:spcPct val="0"/>
+              </a:spcAft>
+              <a:buClr>
+                <a:schemeClr val="tx1"/>
+              </a:buClr>
+              <a:buFont typeface="Wingdings" pitchFamily="2" charset="2"/>
+              <a:buChar char="Ø"/>
+              <a:defRPr kumimoji="1">
+                <a:solidFill>
+                  <a:schemeClr val="tx1"/>
+                </a:solidFill>
+                <a:latin typeface="Verdana" pitchFamily="34" charset="0"/>
+                <a:ea typeface="+mn-ea"/>
+              </a:defRPr>
+            </a:lvl2pPr>
+            <a:lvl3pPr marL="1143000" indent="-228600" algn="l" rtl="0" fontAlgn="base" latinLnBrk="1">
+              <a:spcBef>
+                <a:spcPct val="20000"/>
+              </a:spcBef>
+              <a:spcAft>
+                <a:spcPct val="0"/>
+              </a:spcAft>
+              <a:buClr>
+                <a:schemeClr val="tx1"/>
+              </a:buClr>
+              <a:buFont typeface="Wingdings" pitchFamily="2" charset="2"/>
+              <a:buChar char="§"/>
+              <a:defRPr kumimoji="1" sz="1600">
+                <a:solidFill>
+                  <a:schemeClr val="tx1"/>
+                </a:solidFill>
+                <a:latin typeface="Verdana" pitchFamily="34" charset="0"/>
+                <a:ea typeface="+mn-ea"/>
+              </a:defRPr>
+            </a:lvl3pPr>
+            <a:lvl4pPr marL="1600200" indent="-228600" algn="l" rtl="0" fontAlgn="base" latinLnBrk="1">
+              <a:spcBef>
+                <a:spcPct val="20000"/>
+              </a:spcBef>
+              <a:spcAft>
+                <a:spcPct val="0"/>
+              </a:spcAft>
+              <a:buClr>
+                <a:schemeClr val="bg2"/>
+              </a:buClr>
+              <a:buFont typeface="Wingdings 2" pitchFamily="18" charset="2"/>
+              <a:buChar char=""/>
+              <a:defRPr kumimoji="1" sz="2000">
+                <a:solidFill>
+                  <a:schemeClr val="tx1"/>
+                </a:solidFill>
+                <a:latin typeface="Verdana" pitchFamily="34" charset="0"/>
+                <a:ea typeface="+mn-ea"/>
+              </a:defRPr>
+            </a:lvl4pPr>
+            <a:lvl5pPr marL="2057400" indent="-228600" algn="l" rtl="0" fontAlgn="base" latinLnBrk="1">
+              <a:spcBef>
+                <a:spcPct val="20000"/>
+              </a:spcBef>
+              <a:spcAft>
+                <a:spcPct val="0"/>
+              </a:spcAft>
+              <a:buClr>
+                <a:schemeClr val="bg2"/>
+              </a:buClr>
+              <a:buFont typeface="Arial" charset="0"/>
+              <a:buChar char="»"/>
+              <a:defRPr kumimoji="1" sz="1600">
+                <a:solidFill>
+                  <a:schemeClr val="tx1"/>
+                </a:solidFill>
+                <a:latin typeface="Verdana" pitchFamily="34" charset="0"/>
+                <a:ea typeface="+mn-ea"/>
+              </a:defRPr>
+            </a:lvl5pPr>
+            <a:lvl6pPr marL="2514600" indent="-228600" algn="l" rtl="0" fontAlgn="base" latinLnBrk="1">
+              <a:spcBef>
+                <a:spcPct val="20000"/>
+              </a:spcBef>
+              <a:spcAft>
+                <a:spcPct val="0"/>
+              </a:spcAft>
+              <a:buClr>
+                <a:schemeClr val="bg2"/>
+              </a:buClr>
+              <a:buFont typeface="Arial" charset="0"/>
+              <a:buChar char="»"/>
+              <a:defRPr kumimoji="1" sz="1600">
+                <a:solidFill>
+                  <a:schemeClr val="tx1"/>
+                </a:solidFill>
+                <a:latin typeface="Arial" charset="0"/>
+                <a:ea typeface="+mn-ea"/>
+              </a:defRPr>
+            </a:lvl6pPr>
+            <a:lvl7pPr marL="2971800" indent="-228600" algn="l" rtl="0" fontAlgn="base" latinLnBrk="1">
+              <a:spcBef>
+                <a:spcPct val="20000"/>
+              </a:spcBef>
+              <a:spcAft>
+                <a:spcPct val="0"/>
+              </a:spcAft>
+              <a:buClr>
+                <a:schemeClr val="bg2"/>
+              </a:buClr>
+              <a:buFont typeface="Arial" charset="0"/>
+              <a:buChar char="»"/>
+              <a:defRPr kumimoji="1" sz="1600">
+                <a:solidFill>
+                  <a:schemeClr val="tx1"/>
+                </a:solidFill>
+                <a:latin typeface="Arial" charset="0"/>
+                <a:ea typeface="+mn-ea"/>
+              </a:defRPr>
+            </a:lvl7pPr>
+            <a:lvl8pPr marL="3429000" indent="-228600" algn="l" rtl="0" fontAlgn="base" latinLnBrk="1">
+              <a:spcBef>
+                <a:spcPct val="20000"/>
+              </a:spcBef>
+              <a:spcAft>
+                <a:spcPct val="0"/>
+              </a:spcAft>
+              <a:buClr>
+                <a:schemeClr val="bg2"/>
+              </a:buClr>
+              <a:buFont typeface="Arial" charset="0"/>
+              <a:buChar char="»"/>
+              <a:defRPr kumimoji="1" sz="1600">
+                <a:solidFill>
+                  <a:schemeClr val="tx1"/>
+                </a:solidFill>
+                <a:latin typeface="Arial" charset="0"/>
+                <a:ea typeface="+mn-ea"/>
+              </a:defRPr>
+            </a:lvl8pPr>
+            <a:lvl9pPr marL="3886200" indent="-228600" algn="l" rtl="0" fontAlgn="base" latinLnBrk="1">
+              <a:spcBef>
+                <a:spcPct val="20000"/>
+              </a:spcBef>
+              <a:spcAft>
+                <a:spcPct val="0"/>
+              </a:spcAft>
+              <a:buClr>
+                <a:schemeClr val="bg2"/>
+              </a:buClr>
+              <a:buFont typeface="Arial" charset="0"/>
+              <a:buChar char="»"/>
+              <a:defRPr kumimoji="1" sz="1600">
+                <a:solidFill>
+                  <a:schemeClr val="tx1"/>
+                </a:solidFill>
+                <a:latin typeface="Arial" charset="0"/>
+                <a:ea typeface="+mn-ea"/>
+              </a:defRPr>
+            </a:lvl9pPr>
+          </a:lstStyle>
+          <a:p>
+            <a:endParaRPr lang="en-US" altLang="ko-KR" b="0" i="0" kern="0" dirty="0"/>
+          </a:p>
+        </p:txBody>
+      </p:sp>
+      <p:pic>
+        <p:nvPicPr>
+          <p:cNvPr id="6" name="그림 5" descr="회로, 전자 공학, 전자 부품, 회로 구성요소이(가) 표시된 사진&#10;&#10;AI 생성 콘텐츠는 정확하지 않을 수 있습니다.">
+            <a:extLst>
+              <a:ext uri="{FF2B5EF4-FFF2-40B4-BE49-F238E27FC236}">
+                <a16:creationId xmlns:a16="http://schemas.microsoft.com/office/drawing/2014/main" id="{A9A9DA77-F877-D079-4584-CE21F0B9E689}"/>
+              </a:ext>
+            </a:extLst>
+          </p:cNvPr>
+          <p:cNvPicPr>
+            <a:picLocks noChangeAspect="1"/>
+          </p:cNvPicPr>
+          <p:nvPr/>
+        </p:nvPicPr>
+        <p:blipFill>
+          <a:blip r:embed="rId2"/>
+          <a:stretch>
+            <a:fillRect/>
+          </a:stretch>
+        </p:blipFill>
+        <p:spPr>
+          <a:xfrm>
+            <a:off x="642937" y="1390650"/>
+            <a:ext cx="7858125" cy="4076700"/>
+          </a:xfrm>
+          <a:prstGeom prst="rect">
+            <a:avLst/>
+          </a:prstGeom>
+        </p:spPr>
+      </p:pic>
+    </p:spTree>
+    <p:extLst>
+      <p:ext uri="{BB962C8B-B14F-4D97-AF65-F5344CB8AC3E}">
+        <p14:creationId xmlns:p14="http://schemas.microsoft.com/office/powerpoint/2010/main" val="866267216"/>
+      </p:ext>
+    </p:extLst>
+  </p:cSld>
+  <p:clrMapOvr>
+    <a:masterClrMapping/>
+  </p:clrMapOvr>
+</p:sld>
+</file>
+
+<file path=ppt/slides/slide36.xml><?xml version="1.0" encoding="utf-8"?>
+<p:sld xmlns:a="http://schemas.openxmlformats.org/drawingml/2006/main" xmlns:r="http://schemas.openxmlformats.org/officeDocument/2006/relationships" xmlns:p="http://schemas.openxmlformats.org/presentationml/2006/main">
+  <p:cSld>
+    <p:spTree>
+      <p:nvGrpSpPr>
+        <p:cNvPr id="1" name="">
+          <a:extLst>
+            <a:ext uri="{FF2B5EF4-FFF2-40B4-BE49-F238E27FC236}">
               <a16:creationId xmlns:a16="http://schemas.microsoft.com/office/drawing/2014/main" id="{4690A24D-D3E0-CE30-2483-ABA27E86C4D4}"/>
             </a:ext>
           </a:extLst>
@@ -15899,7 +16219,7 @@
 </p:sld>
 </file>
 
-<file path=ppt/slides/slide36.xml><?xml version="1.0" encoding="utf-8"?>
+<file path=ppt/slides/slide37.xml><?xml version="1.0" encoding="utf-8"?>
 <p:sld xmlns:a="http://schemas.openxmlformats.org/drawingml/2006/main" xmlns:r="http://schemas.openxmlformats.org/officeDocument/2006/relationships" xmlns:p="http://schemas.openxmlformats.org/presentationml/2006/main">
   <p:cSld>
     <p:spTree>
